--- a/考古领域AI架构.pptx
+++ b/考古领域AI架构.pptx
@@ -11585,8 +11585,8 @@
               </p:nvSpPr>
               <p:spPr>
                 <a:xfrm>
-                  <a:off x="823" y="9405"/>
-                  <a:ext cx="2023" cy="275"/>
+                  <a:off x="823" y="9381"/>
+                  <a:ext cx="2023" cy="323"/>
                 </a:xfrm>
                 <a:prstGeom prst="rect">
                   <a:avLst/>
@@ -11603,7 +11603,7 @@
                     <a:buNone/>
                   </a:pPr>
                   <a:r>
-                    <a:rPr sz="1540" b="1">
+                    <a:rPr b="1">
                       <a:solidFill>
                         <a:srgbClr val="12395F"/>
                       </a:solidFill>
@@ -11612,7 +11612,7 @@
                     </a:rPr>
                     <a:t>应用工程</a:t>
                   </a:r>
-                  <a:endParaRPr sz="1540" b="1">
+                  <a:endParaRPr b="1">
                     <a:solidFill>
                       <a:srgbClr val="12395F"/>
                     </a:solidFill>
@@ -24190,7 +24190,7 @@
                 <a:defRPr/>
               </a:pPr>
               <a:r>
-                <a:rPr lang="en-US" sz="1540" b="1" i="0" u="none" strike="noStrike">
+                <a:rPr lang="en-US" b="1" i="0" u="none" strike="noStrike">
                   <a:solidFill>
                     <a:srgbClr val="194E9B"/>
                   </a:solidFill>
@@ -24201,7 +24201,7 @@
                 </a:rPr>
                 <a:t>应用工程</a:t>
               </a:r>
-              <a:endParaRPr lang="en-US" sz="1100"/>
+              <a:endParaRPr lang="en-US"/>
             </a:p>
           </p:txBody>
         </p:sp>

--- a/考古领域AI架构.pptx
+++ b/考古领域AI架构.pptx
@@ -6949,7 +6949,7 @@
                       <a:latin typeface="微软雅黑" panose="020B0503020204020204" charset="-122"/>
                       <a:ea typeface="微软雅黑" panose="020B0503020204020204" charset="-122"/>
                     </a:rPr>
-                    <a:t>实体库</a:t>
+                    <a:t>本体库</a:t>
                   </a:r>
                   <a:endParaRPr lang="zh-CN" sz="1400">
                     <a:solidFill>
@@ -20312,6 +20312,18 @@
                 <a:defRPr/>
               </a:pPr>
               <a:r>
+                <a:rPr lang="zh-CN" altLang="en-US" sz="1400" b="0" i="0" u="none" strike="noStrike">
+                  <a:solidFill>
+                    <a:srgbClr val="000000"/>
+                  </a:solidFill>
+                  <a:latin typeface="微软雅黑" panose="020B0503020204020204" charset="-122"/>
+                  <a:ea typeface="微软雅黑" panose="020B0503020204020204" charset="-122"/>
+                  <a:cs typeface="微软雅黑" panose="020B0503020204020204" charset="-122"/>
+                  <a:sym typeface="微软雅黑" panose="020B0503020204020204" charset="-122"/>
+                </a:rPr>
+                <a:t>本</a:t>
+              </a:r>
+              <a:r>
                 <a:rPr lang="en-US" sz="1400" b="0" i="0" u="none" strike="noStrike">
                   <a:solidFill>
                     <a:srgbClr val="000000"/>
@@ -20321,7 +20333,7 @@
                   <a:cs typeface="微软雅黑" panose="020B0503020204020204" charset="-122"/>
                   <a:sym typeface="微软雅黑" panose="020B0503020204020204" charset="-122"/>
                 </a:rPr>
-                <a:t>实体库</a:t>
+                <a:t>体库</a:t>
               </a:r>
               <a:endParaRPr lang="en-US" sz="1100"/>
             </a:p>
